--- a/vault/blogs/2026-04-30-anthropic-creative-connectors/slides.pptx
+++ b/vault/blogs/2026-04-30-anthropic-creative-connectors/slides.pptx
@@ -4535,8 +4535,8 @@
         </p:nvSpPr>
         <p:spPr>
           <a:xfrm>
-            <a:off x="914400" y="6263640"/>
-            <a:ext cx="10332720" cy="365760"/>
+            <a:off x="731520" y="6263640"/>
+            <a:ext cx="10698480" cy="365760"/>
           </a:xfrm>
           <a:prstGeom prst="rect">
             <a:avLst/>
@@ -4549,14 +4549,14 @@
           </a:bodyPr>
           <a:lstStyle/>
           <a:p>
-            <a:pPr algn="ctr"/>
-            <a:r>
-              <a:rPr sz="1200" b="0">
+            <a:pPr algn="l"/>
+            <a:r>
+              <a:rPr sz="1000" b="0">
                 <a:solidFill>
                   <a:srgbClr val="A1A1AA"/>
                 </a:solidFill>
               </a:rPr>
-              <a:t>Koenig AI Academy</a:t>
+              <a:t>academy.kspl.tech | Koenig AI Academy</a:t>
             </a:r>
           </a:p>
         </p:txBody>
